--- a/docs/presentaciones/classes/clase-120-funciones-y-grafos-autograph-presentacion.pptx
+++ b/docs/presentaciones/classes/clase-120-funciones-y-grafos-autograph-presentacion.pptx
@@ -4888,7 +4888,273 @@
                 </a:solidFill>
                 <a:latin typeface="Courier New"/>
               </a:rPr>
-              <a:t># Imports y configuración inicial</a:t>
+              <a:t>import time</a:t>
+            </a:r>
+          </a:p>
+          <a:p>
+            <a:pPr>
+              <a:defRPr sz="1200" b="0">
+                <a:solidFill>
+                  <a:srgbClr val="F8FAFC"/>
+                </a:solidFill>
+                <a:latin typeface="Courier New"/>
+              </a:defRPr>
+            </a:pPr>
+            <a:r>
+              <a:rPr sz="1200" b="0">
+                <a:solidFill>
+                  <a:srgbClr val="F8FAFC"/>
+                </a:solidFill>
+                <a:latin typeface="Courier New"/>
+              </a:rPr>
+              <a:t>import tensorflow as tf</a:t>
+            </a:r>
+          </a:p>
+          <a:p>
+            <a:pPr>
+              <a:defRPr sz="1200" b="0">
+                <a:solidFill>
+                  <a:srgbClr val="F8FAFC"/>
+                </a:solidFill>
+                <a:latin typeface="Courier New"/>
+              </a:defRPr>
+            </a:pPr>
+            <a:r>
+              <a:rPr sz="1200" b="0">
+                <a:solidFill>
+                  <a:srgbClr val="F8FAFC"/>
+                </a:solidFill>
+                <a:latin typeface="Courier New"/>
+              </a:rPr>
+              <a:t>tf.random.set_seed(42)</a:t>
+            </a:r>
+          </a:p>
+          <a:p>
+            <a:pPr>
+              <a:defRPr sz="1200" b="0">
+                <a:solidFill>
+                  <a:srgbClr val="F8FAFC"/>
+                </a:solidFill>
+                <a:latin typeface="Courier New"/>
+              </a:defRPr>
+            </a:pPr>
+            <a:r>
+              <a:rPr sz="1200" b="0">
+                <a:solidFill>
+                  <a:srgbClr val="F8FAFC"/>
+                </a:solidFill>
+                <a:latin typeface="Courier New"/>
+              </a:rPr>
+              <a:t> </a:t>
+            </a:r>
+          </a:p>
+          <a:p>
+            <a:pPr>
+              <a:defRPr sz="1200" b="0">
+                <a:solidFill>
+                  <a:srgbClr val="F8FAFC"/>
+                </a:solidFill>
+                <a:latin typeface="Courier New"/>
+              </a:defRPr>
+            </a:pPr>
+            <a:r>
+              <a:rPr sz="1200" b="0">
+                <a:solidFill>
+                  <a:srgbClr val="F8FAFC"/>
+                </a:solidFill>
+                <a:latin typeface="Courier New"/>
+              </a:rPr>
+              <a:t>def f_eager(x):</a:t>
+            </a:r>
+          </a:p>
+          <a:p>
+            <a:pPr>
+              <a:defRPr sz="1200" b="0">
+                <a:solidFill>
+                  <a:srgbClr val="F8FAFC"/>
+                </a:solidFill>
+                <a:latin typeface="Courier New"/>
+              </a:defRPr>
+            </a:pPr>
+            <a:r>
+              <a:rPr sz="1200" b="0">
+                <a:solidFill>
+                  <a:srgbClr val="F8FAFC"/>
+                </a:solidFill>
+                <a:latin typeface="Courier New"/>
+              </a:rPr>
+              <a:t>    return tf.reduce_sum(x ** 2 + 3 * x + 1)</a:t>
+            </a:r>
+          </a:p>
+          <a:p>
+            <a:pPr>
+              <a:defRPr sz="1200" b="0">
+                <a:solidFill>
+                  <a:srgbClr val="F8FAFC"/>
+                </a:solidFill>
+                <a:latin typeface="Courier New"/>
+              </a:defRPr>
+            </a:pPr>
+            <a:r>
+              <a:rPr sz="1200" b="0">
+                <a:solidFill>
+                  <a:srgbClr val="F8FAFC"/>
+                </a:solidFill>
+                <a:latin typeface="Courier New"/>
+              </a:rPr>
+              <a:t> </a:t>
+            </a:r>
+          </a:p>
+          <a:p>
+            <a:pPr>
+              <a:defRPr sz="1200" b="0">
+                <a:solidFill>
+                  <a:srgbClr val="F8FAFC"/>
+                </a:solidFill>
+                <a:latin typeface="Courier New"/>
+              </a:defRPr>
+            </a:pPr>
+            <a:r>
+              <a:rPr sz="1200" b="0">
+                <a:solidFill>
+                  <a:srgbClr val="F8FAFC"/>
+                </a:solidFill>
+                <a:latin typeface="Courier New"/>
+              </a:rPr>
+              <a:t>@tf.function</a:t>
+            </a:r>
+          </a:p>
+          <a:p>
+            <a:pPr>
+              <a:defRPr sz="1200" b="0">
+                <a:solidFill>
+                  <a:srgbClr val="F8FAFC"/>
+                </a:solidFill>
+                <a:latin typeface="Courier New"/>
+              </a:defRPr>
+            </a:pPr>
+            <a:r>
+              <a:rPr sz="1200" b="0">
+                <a:solidFill>
+                  <a:srgbClr val="F8FAFC"/>
+                </a:solidFill>
+                <a:latin typeface="Courier New"/>
+              </a:rPr>
+              <a:t>def f_grafo(x):</a:t>
+            </a:r>
+          </a:p>
+          <a:p>
+            <a:pPr>
+              <a:defRPr sz="1200" b="0">
+                <a:solidFill>
+                  <a:srgbClr val="F8FAFC"/>
+                </a:solidFill>
+                <a:latin typeface="Courier New"/>
+              </a:defRPr>
+            </a:pPr>
+            <a:r>
+              <a:rPr sz="1200" b="0">
+                <a:solidFill>
+                  <a:srgbClr val="F8FAFC"/>
+                </a:solidFill>
+                <a:latin typeface="Courier New"/>
+              </a:rPr>
+              <a:t>    return tf.reduce_sum(x ** 2 + 3 * x + 1)</a:t>
+            </a:r>
+          </a:p>
+          <a:p>
+            <a:pPr>
+              <a:defRPr sz="1200" b="0">
+                <a:solidFill>
+                  <a:srgbClr val="F8FAFC"/>
+                </a:solidFill>
+                <a:latin typeface="Courier New"/>
+              </a:defRPr>
+            </a:pPr>
+            <a:r>
+              <a:rPr sz="1200" b="0">
+                <a:solidFill>
+                  <a:srgbClr val="F8FAFC"/>
+                </a:solidFill>
+                <a:latin typeface="Courier New"/>
+              </a:rPr>
+              <a:t> </a:t>
+            </a:r>
+          </a:p>
+          <a:p>
+            <a:pPr>
+              <a:defRPr sz="1200" b="0">
+                <a:solidFill>
+                  <a:srgbClr val="F8FAFC"/>
+                </a:solidFill>
+                <a:latin typeface="Courier New"/>
+              </a:defRPr>
+            </a:pPr>
+            <a:r>
+              <a:rPr sz="1200" b="0">
+                <a:solidFill>
+                  <a:srgbClr val="F8FAFC"/>
+                </a:solidFill>
+                <a:latin typeface="Courier New"/>
+              </a:rPr>
+              <a:t>x = tf.random.normal((1000,))</a:t>
+            </a:r>
+          </a:p>
+          <a:p>
+            <a:pPr>
+              <a:defRPr sz="1200" b="0">
+                <a:solidFill>
+                  <a:srgbClr val="F8FAFC"/>
+                </a:solidFill>
+                <a:latin typeface="Courier New"/>
+              </a:defRPr>
+            </a:pPr>
+            <a:r>
+              <a:rPr sz="1200" b="0">
+                <a:solidFill>
+                  <a:srgbClr val="F8FAFC"/>
+                </a:solidFill>
+                <a:latin typeface="Courier New"/>
+              </a:rPr>
+              <a:t>print("eager:", float(f_eager(x)))</a:t>
+            </a:r>
+          </a:p>
+          <a:p>
+            <a:pPr>
+              <a:defRPr sz="1200" b="0">
+                <a:solidFill>
+                  <a:srgbClr val="F8FAFC"/>
+                </a:solidFill>
+                <a:latin typeface="Courier New"/>
+              </a:defRPr>
+            </a:pPr>
+            <a:r>
+              <a:rPr sz="1200" b="0">
+                <a:solidFill>
+                  <a:srgbClr val="F8FAFC"/>
+                </a:solidFill>
+                <a:latin typeface="Courier New"/>
+              </a:rPr>
+              <a:t>print("grafo:", float(f_grafo(x)))</a:t>
+            </a:r>
+          </a:p>
+          <a:p>
+            <a:pPr>
+              <a:defRPr sz="1200" b="0">
+                <a:solidFill>
+                  <a:srgbClr val="F8FAFC"/>
+                </a:solidFill>
+                <a:latin typeface="Courier New"/>
+              </a:defRPr>
+            </a:pPr>
+            <a:r>
+              <a:rPr sz="1200" b="0">
+                <a:solidFill>
+                  <a:srgbClr val="F8FAFC"/>
+                </a:solidFill>
+                <a:latin typeface="Courier New"/>
+              </a:rPr>
+              <a:t>print("tipo de f_grafo:", type(f_grafo).__name__)</a:t>
             </a:r>
           </a:p>
         </p:txBody>

--- a/docs/presentaciones/classes/clase-120-funciones-y-grafos-autograph-presentacion.pptx
+++ b/docs/presentaciones/classes/clase-120-funciones-y-grafos-autograph-presentacion.pptx
@@ -3272,7 +3272,7 @@
                 </a:solidFill>
                 <a:latin typeface="Segoe UI"/>
               </a:rPr>
-              <a:t>Parte: 2 — Deep Learning · Fuente: Géron, cap. 12 § TF Functions and Graphs.  Duración estimada: 55 min.</a:t>
+              <a:t>Parte: 2 — Deep Learning · Fuente: Géron, cap. 12 § TF Functions and Graphs.  Duración estimada: 55 min. · Nivel: Avanzado</a:t>
             </a:r>
           </a:p>
         </p:txBody>
@@ -3581,7 +3581,7 @@
                 </a:solidFill>
                 <a:latin typeface="Segoe UI"/>
               </a:rPr>
-              <a:t>Parte: 2 — Deep Learning · Fuente: Géron, cap. 12 § TF Functions and Graphs.  Duración estimada: 55 min.</a:t>
+              <a:t>Parte: 2 — Deep Learning · Fuente: Géron, cap. 12 § TF Functions and Graphs.  Duración estimada: 55 min. · Nivel: Avanzado</a:t>
             </a:r>
           </a:p>
         </p:txBody>
